--- a/Optimalisasi-dan-Automasi/Modul-Word/Modul-1-Pengantar-Time-Series-Data.pptx
+++ b/Optimalisasi-dan-Automasi/Modul-Word/Modul-1-Pengantar-Time-Series-Data.pptx
@@ -12161,7 +12161,7 @@
         <p:spPr>
           <a:xfrm>
             <a:off x="1791854" y="1825625"/>
-            <a:ext cx="9561945" cy="4351338"/>
+            <a:ext cx="5900000" cy="3874375"/>
           </a:xfrm>
           <a:prstGeom prst="rect">
             <a:avLst/>
@@ -12185,7 +12185,7 @@
                 <a:spcPts val="0"/>
               </a:spcBef>
               <a:spcAft>
-                <a:spcPts val="600"/>
+                <a:spcPts val="500"/>
               </a:spcAft>
               <a:buClr>
                 <a:schemeClr val="dk1"/>
@@ -12194,11 +12194,11 @@
               <a:buChar char="•"/>
             </a:pPr>
             <a:r>
-              <a:rPr b="1" sz="1400"/>
+              <a:rPr b="1" sz="1200"/>
               <a:t>Environment: </a:t>
             </a:r>
             <a:r>
-              <a:rPr sz="1400"/>
+              <a:rPr sz="1200"/>
               <a:t>conda activate optoauto — numpy, pandas, matplotlib, scipy, statsmodels.</a:t>
             </a:r>
             <a:endParaRPr/>
@@ -12206,75 +12206,75 @@
           <a:p>
             <a:pPr>
               <a:spcAft>
-                <a:spcPts val="600"/>
+                <a:spcPts val="500"/>
               </a:spcAft>
             </a:pPr>
             <a:r>
-              <a:rPr b="1" sz="1400"/>
+              <a:rPr b="1" sz="1200"/>
               <a:t>Cell 1: </a:t>
             </a:r>
             <a:r>
-              <a:rPr sz="1400"/>
+              <a:rPr sz="1200"/>
               <a:t>generate sinyal getaran sintetis 3 frekuensi (25/60/120 Hz) + noise; fs = 1 kHz, 2 detik.</a:t>
             </a:r>
           </a:p>
           <a:p>
             <a:pPr>
               <a:spcAft>
-                <a:spcPts val="600"/>
+                <a:spcPts val="500"/>
               </a:spcAft>
             </a:pPr>
             <a:r>
-              <a:rPr b="1" sz="1400"/>
+              <a:rPr b="1" sz="1200"/>
               <a:t>Cell 2: </a:t>
             </a:r>
             <a:r>
-              <a:rPr sz="1400"/>
+              <a:rPr sz="1200"/>
               <a:t>demonstrasi aliasing — sampling 60/100/500 Hz atas sinyal 50 Hz.</a:t>
             </a:r>
           </a:p>
           <a:p>
             <a:pPr>
               <a:spcAft>
-                <a:spcPts val="600"/>
+                <a:spcPts val="500"/>
               </a:spcAft>
             </a:pPr>
             <a:r>
-              <a:rPr b="1" sz="1400"/>
+              <a:rPr b="1" sz="1200"/>
               <a:t>Cell 3: </a:t>
             </a:r>
             <a:r>
-              <a:rPr sz="1400"/>
+              <a:rPr sz="1200"/>
               <a:t>lima statistik dasar: np.mean, RMS = np.sqrt(np.mean(x**2)), np.std, peak, CF.</a:t>
             </a:r>
           </a:p>
           <a:p>
             <a:pPr>
               <a:spcAft>
-                <a:spcPts val="600"/>
+                <a:spcPts val="500"/>
               </a:spcAft>
             </a:pPr>
             <a:r>
-              <a:rPr b="1" sz="1400"/>
+              <a:rPr b="1" sz="1200"/>
               <a:t>Cell 4: </a:t>
             </a:r>
             <a:r>
-              <a:rPr sz="1400"/>
+              <a:rPr sz="1200"/>
               <a:t>dekomposisi visual deret harian 1 tahun: tren + musiman mingguan + noise.</a:t>
             </a:r>
           </a:p>
           <a:p>
             <a:pPr>
               <a:spcAft>
-                <a:spcPts val="600"/>
+                <a:spcPts val="500"/>
               </a:spcAft>
             </a:pPr>
             <a:r>
-              <a:rPr b="1" sz="1400"/>
+              <a:rPr b="1" sz="1200"/>
               <a:t>Notebook: </a:t>
             </a:r>
             <a:r>
-              <a:rPr sz="1400"/>
+              <a:rPr sz="1200"/>
               <a:t>p1_pengantar_time_series.ipynb — kode lengkap di halaman modul LMS.</a:t>
             </a:r>
           </a:p>
@@ -12302,9 +12302,7 @@
           </a:ln>
         </p:spPr>
         <p:txBody>
-          <a:bodyPr anchorCtr="0" anchor="ctr" bIns="45700" lIns="91425" spcFirstLastPara="1" rIns="91425" wrap="square" tIns="45700">
-            <a:normAutofit/>
-          </a:bodyPr>
+          <a:bodyPr anchorCtr="0" anchor="ctr" bIns="45700" lIns="91425" spcFirstLastPara="1" rIns="91425" wrap="square" tIns="45700"/>
           <a:lstStyle/>
           <a:p>
             <a:pPr indent="0" lvl="0" marL="0" rtl="0" algn="l">
@@ -12325,7 +12323,7 @@
               <a:buNone/>
             </a:pPr>
             <a:r>
-              <a:rPr b="1" lang="en-US">
+              <a:rPr b="1" lang="en-US" sz="2700">
                 <a:solidFill>
                   <a:srgbClr val="0070C0"/>
                 </a:solidFill>
@@ -12552,6 +12550,30 @@
           </a:ln>
         </p:spPr>
       </p:cxnSp>
+      <p:pic>
+        <p:nvPicPr>
+          <p:cNvPr id="189" name="Picture 188" descr="g8_code.png"/>
+          <p:cNvPicPr>
+            <a:picLocks noChangeAspect="1"/>
+          </p:cNvPicPr>
+          <p:nvPr/>
+        </p:nvPicPr>
+        <p:blipFill>
+          <a:blip r:embed="rId5"/>
+          <a:stretch>
+            <a:fillRect/>
+          </a:stretch>
+        </p:blipFill>
+        <p:spPr>
+          <a:xfrm>
+            <a:off x="7911854" y="1931991"/>
+            <a:ext cx="3441945" cy="3661643"/>
+          </a:xfrm>
+          <a:prstGeom prst="rect">
+            <a:avLst/>
+          </a:prstGeom>
+        </p:spPr>
+      </p:pic>
     </p:spTree>
   </p:cSld>
   <p:clrMapOvr>
@@ -12588,7 +12610,7 @@
         <p:spPr>
           <a:xfrm>
             <a:off x="1791854" y="1825625"/>
-            <a:ext cx="9561945" cy="4351338"/>
+            <a:ext cx="5900000" cy="3874375"/>
           </a:xfrm>
           <a:prstGeom prst="rect">
             <a:avLst/>
@@ -12612,7 +12634,7 @@
                 <a:spcPts val="0"/>
               </a:spcBef>
               <a:spcAft>
-                <a:spcPts val="600"/>
+                <a:spcPts val="500"/>
               </a:spcAft>
               <a:buClr>
                 <a:schemeClr val="dk1"/>
@@ -12621,11 +12643,11 @@
               <a:buChar char="•"/>
             </a:pPr>
             <a:r>
-              <a:rPr b="1" sz="1400"/>
+              <a:rPr b="1" sz="1200"/>
               <a:t>Tugas LMS (50 poin): </a:t>
             </a:r>
             <a:r>
-              <a:rPr sz="1400"/>
+              <a:rPr sz="1200"/>
               <a:t>10 PG @1 + 10 komputasi easy @2 + 5 komputasi hard @4 — validasi otomatis server.</a:t>
             </a:r>
             <a:endParaRPr/>
@@ -12633,75 +12655,75 @@
           <a:p>
             <a:pPr>
               <a:spcAft>
-                <a:spcPts val="600"/>
+                <a:spcPts val="500"/>
               </a:spcAft>
             </a:pPr>
             <a:r>
-              <a:rPr b="1" sz="1400"/>
+              <a:rPr b="1" sz="1200"/>
               <a:t>Komputasi easy: </a:t>
             </a:r>
             <a:r>
-              <a:rPr sz="1400"/>
+              <a:rPr sz="1200"/>
               <a:t>mean, RMS, σ, peak, CF, fN, Δt, N sampel, RMS sinus A/√2, SNR dB.</a:t>
             </a:r>
           </a:p>
           <a:p>
             <a:pPr>
               <a:spcAft>
-                <a:spcPts val="600"/>
+                <a:spcPts val="500"/>
               </a:spcAft>
             </a:pPr>
             <a:r>
-              <a:rPr b="1" sz="1400"/>
+              <a:rPr b="1" sz="1200"/>
               <a:t>Komputasi hard: </a:t>
             </a:r>
             <a:r>
-              <a:rPr sz="1400"/>
+              <a:rPr sz="1200"/>
               <a:t>RMS Parseval multi-frekuensi, demonstrasi aliasing + FFT, rolling RMS, periode via ACF, THD.</a:t>
             </a:r>
           </a:p>
           <a:p>
             <a:pPr>
               <a:spcAft>
-                <a:spcPts val="600"/>
+                <a:spcPts val="500"/>
               </a:spcAft>
             </a:pPr>
             <a:r>
-              <a:rPr b="1" sz="1400"/>
+              <a:rPr b="1" sz="1200"/>
               <a:t>Forum — kasus Rendi: </a:t>
             </a:r>
             <a:r>
-              <a:rPr sz="1400"/>
+              <a:rPr sz="1200"/>
               <a:t>setup vibration monitoring 8 motor 11 kW; BPFI 121 Hz, gear mesh 1,5 kHz; DAQ maks 50 kHz.</a:t>
             </a:r>
           </a:p>
           <a:p>
             <a:pPr>
               <a:spcAft>
-                <a:spcPts val="600"/>
+                <a:spcPts val="500"/>
               </a:spcAft>
             </a:pPr>
             <a:r>
-              <a:rPr b="1" sz="1400"/>
+              <a:rPr b="1" sz="1200"/>
               <a:t>Diskusi: </a:t>
             </a:r>
             <a:r>
-              <a:rPr sz="1400"/>
+              <a:rPr sz="1200"/>
               <a:t>(1) pilih sampling rate + alasan; (2) statistik apa disimpan &amp; window-nya; (3) alert rule-based ISO 10816 + persistence.</a:t>
             </a:r>
           </a:p>
           <a:p>
             <a:pPr>
               <a:spcAft>
-                <a:spcPts val="600"/>
+                <a:spcPts val="500"/>
               </a:spcAft>
             </a:pPr>
             <a:r>
-              <a:rPr b="1" sz="1400"/>
+              <a:rPr b="1" sz="1200"/>
               <a:t>Minimal </a:t>
             </a:r>
             <a:r>
-              <a:rPr sz="1400"/>
+              <a:rPr sz="1200"/>
               <a:t>30 kata per jawaban forum; kerjakan sebelum deadline pada jadwal LMS.</a:t>
             </a:r>
           </a:p>
@@ -12729,9 +12751,7 @@
           </a:ln>
         </p:spPr>
         <p:txBody>
-          <a:bodyPr anchorCtr="0" anchor="ctr" bIns="45700" lIns="91425" spcFirstLastPara="1" rIns="91425" wrap="square" tIns="45700">
-            <a:normAutofit/>
-          </a:bodyPr>
+          <a:bodyPr anchorCtr="0" anchor="ctr" bIns="45700" lIns="91425" spcFirstLastPara="1" rIns="91425" wrap="square" tIns="45700"/>
           <a:lstStyle/>
           <a:p>
             <a:pPr indent="0" lvl="0" marL="0" rtl="0" algn="l">
@@ -12752,7 +12772,7 @@
               <a:buNone/>
             </a:pPr>
             <a:r>
-              <a:rPr b="1" lang="en-US">
+              <a:rPr b="1" lang="en-US" sz="2800">
                 <a:solidFill>
                   <a:srgbClr val="0070C0"/>
                 </a:solidFill>
@@ -12979,6 +12999,30 @@
           </a:ln>
         </p:spPr>
       </p:cxnSp>
+      <p:pic>
+        <p:nvPicPr>
+          <p:cNvPr id="199" name="Picture 198" descr="g9_scoring.png"/>
+          <p:cNvPicPr>
+            <a:picLocks noChangeAspect="1"/>
+          </p:cNvPicPr>
+          <p:nvPr/>
+        </p:nvPicPr>
+        <p:blipFill>
+          <a:blip r:embed="rId5"/>
+          <a:stretch>
+            <a:fillRect/>
+          </a:stretch>
+        </p:blipFill>
+        <p:spPr>
+          <a:xfrm>
+            <a:off x="7911854" y="2344672"/>
+            <a:ext cx="3441945" cy="2836280"/>
+          </a:xfrm>
+          <a:prstGeom prst="rect">
+            <a:avLst/>
+          </a:prstGeom>
+        </p:spPr>
+      </p:pic>
     </p:spTree>
   </p:cSld>
   <p:clrMapOvr>
@@ -13758,7 +13802,7 @@
                 <a:cs typeface="Arial"/>
                 <a:sym typeface="Arial"/>
               </a:rPr>
-              <a:t>Kode Mata Kuliah (kode MK)</a:t>
+              <a:t>Kode Mata Kuliah P132520004</a:t>
             </a:r>
             <a:endParaRPr/>
           </a:p>
@@ -14730,9 +14774,7 @@
           </a:ln>
         </p:spPr>
         <p:txBody>
-          <a:bodyPr anchorCtr="0" anchor="ctr" bIns="45700" lIns="91425" spcFirstLastPara="1" rIns="91425" wrap="square" tIns="45700">
-            <a:normAutofit/>
-          </a:bodyPr>
+          <a:bodyPr anchorCtr="0" anchor="ctr" bIns="45700" lIns="91425" spcFirstLastPara="1" rIns="91425" wrap="square" tIns="45700"/>
           <a:lstStyle/>
           <a:p>
             <a:pPr indent="0" lvl="0" marL="0" rtl="0" algn="l">
@@ -14753,7 +14795,7 @@
               <a:buNone/>
             </a:pPr>
             <a:r>
-              <a:rPr b="1" lang="en-US">
+              <a:rPr b="1" lang="en-US" sz="2800">
                 <a:solidFill>
                   <a:srgbClr val="0070C0"/>
                 </a:solidFill>
@@ -14787,7 +14829,7 @@
         <p:spPr>
           <a:xfrm>
             <a:off x="1791854" y="1825625"/>
-            <a:ext cx="9561945" cy="4351338"/>
+            <a:ext cx="5900000" cy="3874375"/>
           </a:xfrm>
           <a:prstGeom prst="rect">
             <a:avLst/>
@@ -14811,7 +14853,7 @@
                 <a:spcPts val="0"/>
               </a:spcBef>
               <a:spcAft>
-                <a:spcPts val="600"/>
+                <a:spcPts val="500"/>
               </a:spcAft>
               <a:buClr>
                 <a:schemeClr val="dk1"/>
@@ -14820,11 +14862,11 @@
               <a:buChar char="•"/>
             </a:pPr>
             <a:r>
-              <a:rPr b="1" sz="1400"/>
+              <a:rPr b="1" sz="1200"/>
               <a:t>Pokok bahasan: </a:t>
             </a:r>
             <a:r>
-              <a:rPr sz="1400"/>
+              <a:rPr sz="1200"/>
               <a:t>akuisisi &amp; pemahaman data time series sensor industri — fondasi seluruh mata kuliah.</a:t>
             </a:r>
             <a:endParaRPr/>
@@ -14832,60 +14874,60 @@
           <a:p>
             <a:pPr>
               <a:spcAft>
-                <a:spcPts val="600"/>
+                <a:spcPts val="500"/>
               </a:spcAft>
             </a:pPr>
             <a:r>
-              <a:rPr b="1" sz="1400"/>
-              <a:t>Sub-CPMK 1.3: </a:t>
+              <a:rPr b="1" sz="1200"/>
+              <a:t>Sub-CPMK 1.1: </a:t>
             </a:r>
             <a:r>
-              <a:rPr sz="1400"/>
+              <a:rPr sz="1200"/>
               <a:t>mampu mempertimbangkan aspek ekonomi dalam desain sistem otomasi.</a:t>
             </a:r>
           </a:p>
           <a:p>
             <a:pPr>
               <a:spcAft>
-                <a:spcPts val="600"/>
+                <a:spcPts val="500"/>
               </a:spcAft>
             </a:pPr>
             <a:r>
-              <a:rPr b="1" sz="1400"/>
+              <a:rPr b="1" sz="1200"/>
               <a:t>Sebelum </a:t>
             </a:r>
             <a:r>
-              <a:rPr sz="1400"/>
+              <a:rPr sz="1200"/>
               <a:t>prediksi kerusakan, optimasi jadwal, atau otomasi keputusan — data harus diakuisisi dengan benar.</a:t>
             </a:r>
           </a:p>
           <a:p>
             <a:pPr>
               <a:spcAft>
-                <a:spcPts val="600"/>
+                <a:spcPts val="500"/>
               </a:spcAft>
             </a:pPr>
             <a:r>
-              <a:rPr b="1" sz="1400"/>
+              <a:rPr b="1" sz="1200"/>
               <a:t>Agenda: </a:t>
             </a:r>
             <a:r>
-              <a:rPr sz="1400"/>
+              <a:rPr sz="1200"/>
               <a:t>konsep dasar → komponen sinyal → statistik dasar → sampling &amp; Nyquist → analogi → aplikasi → Python.</a:t>
             </a:r>
           </a:p>
           <a:p>
             <a:pPr>
               <a:spcAft>
-                <a:spcPts val="600"/>
+                <a:spcPts val="500"/>
               </a:spcAft>
             </a:pPr>
             <a:r>
-              <a:rPr b="1" sz="1400"/>
+              <a:rPr b="1" sz="1200"/>
               <a:t>Evaluasi: </a:t>
             </a:r>
             <a:r>
-              <a:rPr sz="1400"/>
+              <a:rPr sz="1200"/>
               <a:t>Tugas LMS 50 poin (10 PG + 10 komputasi easy + 5 komputasi hard) + Forum studi kasus.</a:t>
             </a:r>
           </a:p>
@@ -15095,6 +15137,30 @@
           </a:ln>
         </p:spPr>
       </p:cxnSp>
+      <p:pic>
+        <p:nvPicPr>
+          <p:cNvPr id="119" name="Picture 118" descr="g5_roadmap.png"/>
+          <p:cNvPicPr>
+            <a:picLocks noChangeAspect="1"/>
+          </p:cNvPicPr>
+          <p:nvPr/>
+        </p:nvPicPr>
+        <p:blipFill>
+          <a:blip r:embed="rId5"/>
+          <a:stretch>
+            <a:fillRect/>
+          </a:stretch>
+        </p:blipFill>
+        <p:spPr>
+          <a:xfrm>
+            <a:off x="8164020" y="1825625"/>
+            <a:ext cx="2937612" cy="3874375"/>
+          </a:xfrm>
+          <a:prstGeom prst="rect">
+            <a:avLst/>
+          </a:prstGeom>
+        </p:spPr>
+      </p:pic>
     </p:spTree>
   </p:cSld>
   <p:clrMapOvr>
@@ -15131,7 +15197,7 @@
         <p:spPr>
           <a:xfrm>
             <a:off x="1791854" y="1825625"/>
-            <a:ext cx="9561945" cy="4351338"/>
+            <a:ext cx="5900000" cy="3874375"/>
           </a:xfrm>
           <a:prstGeom prst="rect">
             <a:avLst/>
@@ -15155,7 +15221,7 @@
                 <a:spcPts val="0"/>
               </a:spcBef>
               <a:spcAft>
-                <a:spcPts val="600"/>
+                <a:spcPts val="500"/>
               </a:spcAft>
               <a:buClr>
                 <a:schemeClr val="dk1"/>
@@ -15164,11 +15230,11 @@
               <a:buChar char="•"/>
             </a:pPr>
             <a:r>
-              <a:rPr b="1" sz="1400"/>
+              <a:rPr b="1" sz="1200"/>
               <a:t>Definisi: </a:t>
             </a:r>
             <a:r>
-              <a:rPr sz="1400"/>
+              <a:rPr sz="1200"/>
               <a:t>urutan observasi terhadap indeks waktu, {xt} untuk t = 1..N — urutan adalah informasi.</a:t>
             </a:r>
             <a:endParaRPr/>
@@ -15176,60 +15242,60 @@
           <a:p>
             <a:pPr>
               <a:spcAft>
-                <a:spcPts val="600"/>
+                <a:spcPts val="500"/>
               </a:spcAft>
             </a:pPr>
             <a:r>
-              <a:rPr b="1" sz="1400"/>
+              <a:rPr b="1" sz="1200"/>
               <a:t>Temporal dependency: </a:t>
             </a:r>
             <a:r>
-              <a:rPr sz="1400"/>
+              <a:rPr sz="1200"/>
               <a:t>xt ≈ f(xt−1, xt−2, ...) — mengacak urutan menghancurkan makna.</a:t>
             </a:r>
           </a:p>
           <a:p>
             <a:pPr>
               <a:spcAft>
-                <a:spcPts val="600"/>
+                <a:spcPts val="500"/>
               </a:spcAft>
             </a:pPr>
             <a:r>
-              <a:rPr b="1" sz="1400"/>
+              <a:rPr b="1" sz="1200"/>
               <a:t>Sumber data: </a:t>
             </a:r>
             <a:r>
-              <a:rPr sz="1400"/>
+              <a:rPr sz="1200"/>
               <a:t>akselerometer, termokopel, strain gauge, arus motor, tekanan — semua menghasilkan time series.</a:t>
             </a:r>
           </a:p>
           <a:p>
             <a:pPr>
               <a:spcAft>
-                <a:spcPts val="600"/>
+                <a:spcPts val="500"/>
               </a:spcAft>
             </a:pPr>
             <a:r>
-              <a:rPr b="1" sz="1400"/>
+              <a:rPr b="1" sz="1200"/>
               <a:t>Sinyal periodik: </a:t>
             </a:r>
             <a:r>
-              <a:rPr sz="1400"/>
+              <a:rPr sz="1200"/>
               <a:t>x(t) = A·sin(2πft + φ) — dasar FFT, deteksi anomali, dan prediksi.</a:t>
             </a:r>
           </a:p>
           <a:p>
             <a:pPr>
               <a:spcAft>
-                <a:spcPts val="600"/>
+                <a:spcPts val="500"/>
               </a:spcAft>
             </a:pPr>
             <a:r>
-              <a:rPr b="1" sz="1400"/>
+              <a:rPr b="1" sz="1200"/>
               <a:t>Noise &amp; SNR: </a:t>
             </a:r>
             <a:r>
-              <a:rPr sz="1400"/>
+              <a:rPr sz="1200"/>
               <a:t>SNR = 10·log₁₀(Psinyal/Pnoise) menentukan pola terdeteksi atau tertutup derau.</a:t>
             </a:r>
           </a:p>
@@ -15257,9 +15323,7 @@
           </a:ln>
         </p:spPr>
         <p:txBody>
-          <a:bodyPr anchorCtr="0" anchor="ctr" bIns="45700" lIns="91425" spcFirstLastPara="1" rIns="91425" wrap="square" tIns="45700">
-            <a:normAutofit/>
-          </a:bodyPr>
+          <a:bodyPr anchorCtr="0" anchor="ctr" bIns="45700" lIns="91425" spcFirstLastPara="1" rIns="91425" wrap="square" tIns="45700"/>
           <a:lstStyle/>
           <a:p>
             <a:pPr indent="0" lvl="0" marL="0" rtl="0" algn="l">
@@ -15280,7 +15344,7 @@
               <a:buNone/>
             </a:pPr>
             <a:r>
-              <a:rPr b="1" lang="en-US">
+              <a:rPr b="1" lang="en-US" sz="2800">
                 <a:solidFill>
                   <a:srgbClr val="0070C0"/>
                 </a:solidFill>
@@ -15507,6 +15571,30 @@
           </a:ln>
         </p:spPr>
       </p:cxnSp>
+      <p:pic>
+        <p:nvPicPr>
+          <p:cNvPr id="129" name="Picture 128" descr="g1_signal.png"/>
+          <p:cNvPicPr>
+            <a:picLocks noChangeAspect="1"/>
+          </p:cNvPicPr>
+          <p:nvPr/>
+        </p:nvPicPr>
+        <p:blipFill>
+          <a:blip r:embed="rId5"/>
+          <a:stretch>
+            <a:fillRect/>
+          </a:stretch>
+        </p:blipFill>
+        <p:spPr>
+          <a:xfrm>
+            <a:off x="7911854" y="2368583"/>
+            <a:ext cx="3441945" cy="2788458"/>
+          </a:xfrm>
+          <a:prstGeom prst="rect">
+            <a:avLst/>
+          </a:prstGeom>
+        </p:spPr>
+      </p:pic>
     </p:spTree>
   </p:cSld>
   <p:clrMapOvr>
@@ -15543,7 +15631,7 @@
         <p:spPr>
           <a:xfrm>
             <a:off x="1791854" y="1825625"/>
-            <a:ext cx="9561945" cy="4351338"/>
+            <a:ext cx="5900000" cy="3874375"/>
           </a:xfrm>
           <a:prstGeom prst="rect">
             <a:avLst/>
@@ -15567,7 +15655,7 @@
                 <a:spcPts val="0"/>
               </a:spcBef>
               <a:spcAft>
-                <a:spcPts val="600"/>
+                <a:spcPts val="500"/>
               </a:spcAft>
               <a:buClr>
                 <a:schemeClr val="dk1"/>
@@ -15576,11 +15664,11 @@
               <a:buChar char="•"/>
             </a:pPr>
             <a:r>
-              <a:rPr b="1" sz="1400"/>
+              <a:rPr b="1" sz="1200"/>
               <a:t>Model aditif: </a:t>
             </a:r>
             <a:r>
-              <a:rPr sz="1400"/>
+              <a:rPr sz="1200"/>
               <a:t>yt = Tt + St + Ct + εt (tren + musiman + siklik + noise).</a:t>
             </a:r>
             <a:endParaRPr/>
@@ -15588,75 +15676,75 @@
           <a:p>
             <a:pPr>
               <a:spcAft>
-                <a:spcPts val="600"/>
+                <a:spcPts val="500"/>
               </a:spcAft>
             </a:pPr>
             <a:r>
-              <a:rPr b="1" sz="1400"/>
+              <a:rPr b="1" sz="1200"/>
               <a:t>Tren: </a:t>
             </a:r>
             <a:r>
-              <a:rPr sz="1400"/>
+              <a:rPr sz="1200"/>
               <a:t>pergerakan jangka panjang — aus bearing progresif; linear/eksponensial/logaritmik.</a:t>
             </a:r>
           </a:p>
           <a:p>
             <a:pPr>
               <a:spcAft>
-                <a:spcPts val="600"/>
+                <a:spcPts val="500"/>
               </a:spcAft>
             </a:pPr>
             <a:r>
-              <a:rPr b="1" sz="1400"/>
+              <a:rPr b="1" sz="1200"/>
               <a:t>Musiman: </a:t>
             </a:r>
             <a:r>
-              <a:rPr sz="1400"/>
+              <a:rPr sz="1200"/>
               <a:t>periode tetap terkait kalender (shift harian, weekend, jadwal maintenance); St+s = St.</a:t>
             </a:r>
           </a:p>
           <a:p>
             <a:pPr>
               <a:spcAft>
-                <a:spcPts val="600"/>
+                <a:spcPts val="500"/>
               </a:spcAft>
             </a:pPr>
             <a:r>
-              <a:rPr b="1" sz="1400"/>
+              <a:rPr b="1" sz="1200"/>
               <a:t>Siklik: </a:t>
             </a:r>
             <a:r>
-              <a:rPr sz="1400"/>
+              <a:rPr sz="1200"/>
               <a:t>berulang tanpa periode tetap (ekonomi, permintaan pasar) — tidak terikat kalender.</a:t>
             </a:r>
           </a:p>
           <a:p>
             <a:pPr>
               <a:spcAft>
-                <a:spcPts val="600"/>
+                <a:spcPts val="500"/>
               </a:spcAft>
             </a:pPr>
             <a:r>
-              <a:rPr b="1" sz="1400"/>
+              <a:rPr b="1" sz="1200"/>
               <a:t>Residual/noise: </a:t>
             </a:r>
             <a:r>
-              <a:rPr sz="1400"/>
+              <a:rPr sz="1200"/>
               <a:t>idealnya white noise εt ~ N(0, σ²); anomali nyata = residual besar.</a:t>
             </a:r>
           </a:p>
           <a:p>
             <a:pPr>
               <a:spcAft>
-                <a:spcPts val="600"/>
+                <a:spcPts val="500"/>
               </a:spcAft>
             </a:pPr>
             <a:r>
-              <a:rPr b="1" sz="1400"/>
+              <a:rPr b="1" sz="1200"/>
               <a:t>Deteksi: </a:t>
             </a:r>
             <a:r>
-              <a:rPr sz="1400"/>
+              <a:rPr sz="1200"/>
               <a:t>regresi/moving average (tren), FFT/STL/ACF (musiman), analisis residual (noise).</a:t>
             </a:r>
           </a:p>
@@ -15684,9 +15772,7 @@
           </a:ln>
         </p:spPr>
         <p:txBody>
-          <a:bodyPr anchorCtr="0" anchor="ctr" bIns="45700" lIns="91425" spcFirstLastPara="1" rIns="91425" wrap="square" tIns="45700">
-            <a:normAutofit/>
-          </a:bodyPr>
+          <a:bodyPr anchorCtr="0" anchor="ctr" bIns="45700" lIns="91425" spcFirstLastPara="1" rIns="91425" wrap="square" tIns="45700"/>
           <a:lstStyle/>
           <a:p>
             <a:pPr indent="0" lvl="0" marL="0" rtl="0" algn="l">
@@ -15707,7 +15793,7 @@
               <a:buNone/>
             </a:pPr>
             <a:r>
-              <a:rPr b="1" lang="en-US">
+              <a:rPr b="1" lang="en-US" sz="2800">
                 <a:solidFill>
                   <a:srgbClr val="0070C0"/>
                 </a:solidFill>
@@ -15934,6 +16020,30 @@
           </a:ln>
         </p:spPr>
       </p:cxnSp>
+      <p:pic>
+        <p:nvPicPr>
+          <p:cNvPr id="139" name="Picture 138" descr="g2_decompose.png"/>
+          <p:cNvPicPr>
+            <a:picLocks noChangeAspect="1"/>
+          </p:cNvPicPr>
+          <p:nvPr/>
+        </p:nvPicPr>
+        <p:blipFill>
+          <a:blip r:embed="rId5"/>
+          <a:stretch>
+            <a:fillRect/>
+          </a:stretch>
+        </p:blipFill>
+        <p:spPr>
+          <a:xfrm>
+            <a:off x="8047358" y="1825625"/>
+            <a:ext cx="3170937" cy="3874375"/>
+          </a:xfrm>
+          <a:prstGeom prst="rect">
+            <a:avLst/>
+          </a:prstGeom>
+        </p:spPr>
+      </p:pic>
     </p:spTree>
   </p:cSld>
   <p:clrMapOvr>
@@ -15970,7 +16080,7 @@
         <p:spPr>
           <a:xfrm>
             <a:off x="1791854" y="1825625"/>
-            <a:ext cx="9561945" cy="4351338"/>
+            <a:ext cx="5900000" cy="3874375"/>
           </a:xfrm>
           <a:prstGeom prst="rect">
             <a:avLst/>
@@ -15994,7 +16104,7 @@
                 <a:spcPts val="0"/>
               </a:spcBef>
               <a:spcAft>
-                <a:spcPts val="600"/>
+                <a:spcPts val="500"/>
               </a:spcAft>
               <a:buClr>
                 <a:schemeClr val="dk1"/>
@@ -16003,11 +16113,11 @@
               <a:buChar char="•"/>
             </a:pPr>
             <a:r>
-              <a:rPr b="1" sz="1400"/>
+              <a:rPr b="1" sz="1200"/>
               <a:t>Mean (μ): </a:t>
             </a:r>
             <a:r>
-              <a:rPr sz="1400"/>
+              <a:rPr sz="1200"/>
               <a:t>sinyal AC ≈ 0 — pergeserannya menandakan DC offset / drift sensor.</a:t>
             </a:r>
             <a:endParaRPr/>
@@ -16015,75 +16125,75 @@
           <a:p>
             <a:pPr>
               <a:spcAft>
-                <a:spcPts val="600"/>
+                <a:spcPts val="500"/>
               </a:spcAft>
             </a:pPr>
             <a:r>
-              <a:rPr b="1" sz="1400"/>
+              <a:rPr b="1" sz="1200"/>
               <a:t>RMS: </a:t>
             </a:r>
             <a:r>
-              <a:rPr sz="1400"/>
+              <a:rPr sz="1200"/>
               <a:t>√((1/N)Σx²) — energi efektif; basis klasifikasi severity ISO 10816.</a:t>
             </a:r>
           </a:p>
           <a:p>
             <a:pPr>
               <a:spcAft>
-                <a:spcPts val="600"/>
+                <a:spcPts val="500"/>
               </a:spcAft>
             </a:pPr>
             <a:r>
-              <a:rPr b="1" sz="1400"/>
+              <a:rPr b="1" sz="1200"/>
               <a:t>Std (σ): </a:t>
             </a:r>
             <a:r>
-              <a:rPr sz="1400"/>
+              <a:rPr sz="1200"/>
               <a:t>sebaran terhadap mean; aturan 3σ untuk outlier; sinyal mean-nol → σ ≈ RMS.</a:t>
             </a:r>
           </a:p>
           <a:p>
             <a:pPr>
               <a:spcAft>
-                <a:spcPts val="600"/>
+                <a:spcPts val="500"/>
               </a:spcAft>
             </a:pPr>
             <a:r>
-              <a:rPr b="1" sz="1400"/>
+              <a:rPr b="1" sz="1200"/>
               <a:t>Peak: </a:t>
             </a:r>
             <a:r>
-              <a:rPr sz="1400"/>
+              <a:rPr sz="1200"/>
               <a:t>lonjakan absolut tertinggi — stres mekanik maksimum.</a:t>
             </a:r>
           </a:p>
           <a:p>
             <a:pPr>
               <a:spcAft>
-                <a:spcPts val="600"/>
+                <a:spcPts val="500"/>
               </a:spcAft>
             </a:pPr>
             <a:r>
-              <a:rPr b="1" sz="1400"/>
+              <a:rPr b="1" sz="1200"/>
               <a:t>Crest Factor: </a:t>
             </a:r>
             <a:r>
-              <a:rPr sz="1400"/>
+              <a:rPr sz="1200"/>
               <a:t>Peak/RMS; sinus murni ≈ 1,41; CF &gt; 4 = impulsif (spalling bearing).</a:t>
             </a:r>
           </a:p>
           <a:p>
             <a:pPr>
               <a:spcAft>
-                <a:spcPts val="600"/>
+                <a:spcPts val="500"/>
               </a:spcAft>
             </a:pPr>
             <a:r>
-              <a:rPr b="1" sz="1400"/>
+              <a:rPr b="1" sz="1200"/>
               <a:t>Praktik: </a:t>
             </a:r>
             <a:r>
-              <a:rPr sz="1400"/>
+              <a:rPr sz="1200"/>
               <a:t>hitung per window bergerak (mis. 1 detik) → tren RMS bergulir = kurva kesehatan mesin.</a:t>
             </a:r>
           </a:p>
@@ -16111,9 +16221,7 @@
           </a:ln>
         </p:spPr>
         <p:txBody>
-          <a:bodyPr anchorCtr="0" anchor="ctr" bIns="45700" lIns="91425" spcFirstLastPara="1" rIns="91425" wrap="square" tIns="45700">
-            <a:normAutofit/>
-          </a:bodyPr>
+          <a:bodyPr anchorCtr="0" anchor="ctr" bIns="45700" lIns="91425" spcFirstLastPara="1" rIns="91425" wrap="square" tIns="45700"/>
           <a:lstStyle/>
           <a:p>
             <a:pPr indent="0" lvl="0" marL="0" rtl="0" algn="l">
@@ -16134,7 +16242,7 @@
               <a:buNone/>
             </a:pPr>
             <a:r>
-              <a:rPr b="1" lang="en-US">
+              <a:rPr b="1" lang="en-US" sz="2200">
                 <a:solidFill>
                   <a:srgbClr val="0070C0"/>
                 </a:solidFill>
@@ -16361,6 +16469,30 @@
           </a:ln>
         </p:spPr>
       </p:cxnSp>
+      <p:pic>
+        <p:nvPicPr>
+          <p:cNvPr id="149" name="Picture 148" descr="g4_rmscf.png"/>
+          <p:cNvPicPr>
+            <a:picLocks noChangeAspect="1"/>
+          </p:cNvPicPr>
+          <p:nvPr/>
+        </p:nvPicPr>
+        <p:blipFill>
+          <a:blip r:embed="rId5"/>
+          <a:stretch>
+            <a:fillRect/>
+          </a:stretch>
+        </p:blipFill>
+        <p:spPr>
+          <a:xfrm>
+            <a:off x="7911854" y="2501307"/>
+            <a:ext cx="3441945" cy="2523010"/>
+          </a:xfrm>
+          <a:prstGeom prst="rect">
+            <a:avLst/>
+          </a:prstGeom>
+        </p:spPr>
+      </p:pic>
     </p:spTree>
   </p:cSld>
   <p:clrMapOvr>
@@ -16397,7 +16529,7 @@
         <p:spPr>
           <a:xfrm>
             <a:off x="1791854" y="1825625"/>
-            <a:ext cx="9561945" cy="4351338"/>
+            <a:ext cx="5900000" cy="3874375"/>
           </a:xfrm>
           <a:prstGeom prst="rect">
             <a:avLst/>
@@ -16421,7 +16553,7 @@
                 <a:spcPts val="0"/>
               </a:spcBef>
               <a:spcAft>
-                <a:spcPts val="600"/>
+                <a:spcPts val="500"/>
               </a:spcAft>
               <a:buClr>
                 <a:schemeClr val="dk1"/>
@@ -16430,11 +16562,11 @@
               <a:buChar char="•"/>
             </a:pPr>
             <a:r>
-              <a:rPr b="1" sz="1400"/>
+              <a:rPr b="1" sz="1200"/>
               <a:t>Teorema: </a:t>
             </a:r>
             <a:r>
-              <a:rPr sz="1400"/>
+              <a:rPr sz="1200"/>
               <a:t>fs ≥ 2·fmaks agar sinyal dapat direkonstruksi tanpa distorsi.</a:t>
             </a:r>
             <a:endParaRPr/>
@@ -16442,60 +16574,60 @@
           <a:p>
             <a:pPr>
               <a:spcAft>
-                <a:spcPts val="600"/>
+                <a:spcPts val="500"/>
               </a:spcAft>
             </a:pPr>
             <a:r>
-              <a:rPr b="1" sz="1400"/>
+              <a:rPr b="1" sz="1200"/>
               <a:t>Frekuensi Nyquist: </a:t>
             </a:r>
             <a:r>
-              <a:rPr sz="1400"/>
+              <a:rPr sz="1200"/>
               <a:t>fN = fs/2 — batas frekuensi tertinggi yang dapat direpresentasikan.</a:t>
             </a:r>
           </a:p>
           <a:p>
             <a:pPr>
               <a:spcAft>
-                <a:spcPts val="600"/>
+                <a:spcPts val="500"/>
               </a:spcAft>
             </a:pPr>
             <a:r>
-              <a:rPr b="1" sz="1400"/>
+              <a:rPr b="1" sz="1200"/>
               <a:t>Aliasing: </a:t>
             </a:r>
             <a:r>
-              <a:rPr sz="1400"/>
+              <a:rPr sz="1200"/>
               <a:t>sinyal di atas fN tampil palsu di bawah fN (falias = |f − k·fs|) — cegah dengan filter analog low-pass.</a:t>
             </a:r>
           </a:p>
           <a:p>
             <a:pPr>
               <a:spcAft>
-                <a:spcPts val="600"/>
+                <a:spcPts val="500"/>
               </a:spcAft>
             </a:pPr>
             <a:r>
-              <a:rPr b="1" sz="1400"/>
+              <a:rPr b="1" sz="1200"/>
               <a:t>Oversampling: </a:t>
             </a:r>
             <a:r>
-              <a:rPr sz="1400"/>
+              <a:rPr sz="1200"/>
               <a:t>praktik industri fs = 5–10× fmaks; trade-off storage &amp; processing (aspek ekonomi!).</a:t>
             </a:r>
           </a:p>
           <a:p>
             <a:pPr>
               <a:spcAft>
-                <a:spcPts val="600"/>
+                <a:spcPts val="500"/>
               </a:spcAft>
             </a:pPr>
             <a:r>
-              <a:rPr b="1" sz="1400"/>
+              <a:rPr b="1" sz="1200"/>
               <a:t>Contoh: </a:t>
             </a:r>
             <a:r>
-              <a:rPr sz="1400"/>
+              <a:rPr sz="1200"/>
               <a:t>suhu 1–10 Hz; getaran mesin 10 kHz (ISO 10816); bearing high-speed 40–50 kHz.</a:t>
             </a:r>
           </a:p>
@@ -16523,9 +16655,7 @@
           </a:ln>
         </p:spPr>
         <p:txBody>
-          <a:bodyPr anchorCtr="0" anchor="ctr" bIns="45700" lIns="91425" spcFirstLastPara="1" rIns="91425" wrap="square" tIns="45700">
-            <a:normAutofit/>
-          </a:bodyPr>
+          <a:bodyPr anchorCtr="0" anchor="ctr" bIns="45700" lIns="91425" spcFirstLastPara="1" rIns="91425" wrap="square" tIns="45700"/>
           <a:lstStyle/>
           <a:p>
             <a:pPr indent="0" lvl="0" marL="0" rtl="0" algn="l">
@@ -16546,7 +16676,7 @@
               <a:buNone/>
             </a:pPr>
             <a:r>
-              <a:rPr b="1" lang="en-US">
+              <a:rPr b="1" lang="en-US" sz="2800">
                 <a:solidFill>
                   <a:srgbClr val="0070C0"/>
                 </a:solidFill>
@@ -16773,6 +16903,30 @@
           </a:ln>
         </p:spPr>
       </p:cxnSp>
+      <p:pic>
+        <p:nvPicPr>
+          <p:cNvPr id="159" name="Picture 158" descr="g3_aliasing.png"/>
+          <p:cNvPicPr>
+            <a:picLocks noChangeAspect="1"/>
+          </p:cNvPicPr>
+          <p:nvPr/>
+        </p:nvPicPr>
+        <p:blipFill>
+          <a:blip r:embed="rId5"/>
+          <a:stretch>
+            <a:fillRect/>
+          </a:stretch>
+        </p:blipFill>
+        <p:spPr>
+          <a:xfrm>
+            <a:off x="7911854" y="2496945"/>
+            <a:ext cx="3441945" cy="2531734"/>
+          </a:xfrm>
+          <a:prstGeom prst="rect">
+            <a:avLst/>
+          </a:prstGeom>
+        </p:spPr>
+      </p:pic>
     </p:spTree>
   </p:cSld>
   <p:clrMapOvr>
@@ -16809,7 +16963,7 @@
         <p:spPr>
           <a:xfrm>
             <a:off x="1791854" y="1825625"/>
-            <a:ext cx="9561945" cy="4351338"/>
+            <a:ext cx="5900000" cy="3874375"/>
           </a:xfrm>
           <a:prstGeom prst="rect">
             <a:avLst/>
@@ -16833,7 +16987,7 @@
                 <a:spcPts val="0"/>
               </a:spcBef>
               <a:spcAft>
-                <a:spcPts val="600"/>
+                <a:spcPts val="500"/>
               </a:spcAft>
               <a:buClr>
                 <a:schemeClr val="dk1"/>
@@ -16842,11 +16996,11 @@
               <a:buChar char="•"/>
             </a:pPr>
             <a:r>
-              <a:rPr b="1" sz="1400"/>
+              <a:rPr b="1" sz="1200"/>
               <a:t>Burst kamera HP: </a:t>
             </a:r>
             <a:r>
-              <a:rPr sz="1400"/>
+              <a:rPr sz="1200"/>
               <a:t>fps = sampling rate; kepakan sayap burung ter-alias bila fps &lt; 2× frekuensi kepak.</a:t>
             </a:r>
             <a:endParaRPr/>
@@ -16854,75 +17008,75 @@
           <a:p>
             <a:pPr>
               <a:spcAft>
-                <a:spcPts val="600"/>
+                <a:spcPts val="500"/>
               </a:spcAft>
             </a:pPr>
             <a:r>
-              <a:rPr b="1" sz="1400"/>
+              <a:rPr b="1" sz="1200"/>
               <a:t>Lalu lintas tol: </a:t>
             </a:r>
             <a:r>
-              <a:rPr sz="1400"/>
+              <a:rPr sz="1200"/>
               <a:t>pola harian/mingguan/tahunan + tren — semua komponen dalam satu deret.</a:t>
             </a:r>
           </a:p>
           <a:p>
             <a:pPr>
               <a:spcAft>
-                <a:spcPts val="600"/>
+                <a:spcPts val="500"/>
               </a:spcAft>
             </a:pPr>
             <a:r>
-              <a:rPr b="1" sz="1400"/>
+              <a:rPr b="1" sz="1200"/>
               <a:t>Spotify loudness: </a:t>
             </a:r>
             <a:r>
-              <a:rPr sz="1400"/>
+              <a:rPr sz="1200"/>
               <a:t>normalisasi volume memakai RMS (target −14 LUFS) — energi efektif, bukan puncak.</a:t>
             </a:r>
           </a:p>
           <a:p>
             <a:pPr>
               <a:spcAft>
-                <a:spcPts val="600"/>
+                <a:spcPts val="500"/>
               </a:spcAft>
             </a:pPr>
             <a:r>
-              <a:rPr b="1" sz="1400"/>
+              <a:rPr b="1" sz="1200"/>
               <a:t>Vinyl vs MP3: </a:t>
             </a:r>
             <a:r>
-              <a:rPr sz="1400"/>
+              <a:rPr sz="1200"/>
               <a:t>CD 44,1 kHz = Nyquist untuk pendengaran ±20 kHz; beda rasa = kuantisasi.</a:t>
             </a:r>
           </a:p>
           <a:p>
             <a:pPr>
               <a:spcAft>
-                <a:spcPts val="600"/>
+                <a:spcPts val="500"/>
               </a:spcAft>
             </a:pPr>
             <a:r>
-              <a:rPr b="1" sz="1400"/>
+              <a:rPr b="1" sz="1200"/>
               <a:t>EKG jantung: </a:t>
             </a:r>
             <a:r>
-              <a:rPr sz="1400"/>
+              <a:rPr sz="1200"/>
               <a:t>peak P-QRS-T tegas = crest factor tinggi; aritmia mengubah CF — mirip bearing spalling.</a:t>
             </a:r>
           </a:p>
           <a:p>
             <a:pPr>
               <a:spcAft>
-                <a:spcPts val="600"/>
+                <a:spcPts val="500"/>
               </a:spcAft>
             </a:pPr>
             <a:r>
-              <a:rPr b="1" sz="1400"/>
+              <a:rPr b="1" sz="1200"/>
               <a:t>Cuaca BMKG: </a:t>
             </a:r>
             <a:r>
-              <a:rPr sz="1400"/>
+              <a:rPr sz="1200"/>
               <a:t>tiap fenomena punya characteristic frequency &amp; sampling rate sendiri.</a:t>
             </a:r>
           </a:p>
@@ -16950,9 +17104,7 @@
           </a:ln>
         </p:spPr>
         <p:txBody>
-          <a:bodyPr anchorCtr="0" anchor="ctr" bIns="45700" lIns="91425" spcFirstLastPara="1" rIns="91425" wrap="square" tIns="45700">
-            <a:normAutofit/>
-          </a:bodyPr>
+          <a:bodyPr anchorCtr="0" anchor="ctr" bIns="45700" lIns="91425" spcFirstLastPara="1" rIns="91425" wrap="square" tIns="45700"/>
           <a:lstStyle/>
           <a:p>
             <a:pPr indent="0" lvl="0" marL="0" rtl="0" algn="l">
@@ -16973,7 +17125,7 @@
               <a:buNone/>
             </a:pPr>
             <a:r>
-              <a:rPr b="1" lang="en-US">
+              <a:rPr b="1" lang="en-US" sz="2800">
                 <a:solidFill>
                   <a:srgbClr val="0070C0"/>
                 </a:solidFill>
@@ -17200,6 +17352,30 @@
           </a:ln>
         </p:spPr>
       </p:cxnSp>
+      <p:pic>
+        <p:nvPicPr>
+          <p:cNvPr id="169" name="Picture 168" descr="g6_analogi.png"/>
+          <p:cNvPicPr>
+            <a:picLocks noChangeAspect="1"/>
+          </p:cNvPicPr>
+          <p:nvPr/>
+        </p:nvPicPr>
+        <p:blipFill>
+          <a:blip r:embed="rId5"/>
+          <a:stretch>
+            <a:fillRect/>
+          </a:stretch>
+        </p:blipFill>
+        <p:spPr>
+          <a:xfrm>
+            <a:off x="8311215" y="1825625"/>
+            <a:ext cx="2643223" cy="3874375"/>
+          </a:xfrm>
+          <a:prstGeom prst="rect">
+            <a:avLst/>
+          </a:prstGeom>
+        </p:spPr>
+      </p:pic>
     </p:spTree>
   </p:cSld>
   <p:clrMapOvr>
@@ -17236,7 +17412,7 @@
         <p:spPr>
           <a:xfrm>
             <a:off x="1791854" y="1825625"/>
-            <a:ext cx="9561945" cy="4351338"/>
+            <a:ext cx="5900000" cy="3874375"/>
           </a:xfrm>
           <a:prstGeom prst="rect">
             <a:avLst/>
@@ -17260,7 +17436,7 @@
                 <a:spcPts val="0"/>
               </a:spcBef>
               <a:spcAft>
-                <a:spcPts val="600"/>
+                <a:spcPts val="500"/>
               </a:spcAft>
               <a:buClr>
                 <a:schemeClr val="dk1"/>
@@ -17269,11 +17445,11 @@
               <a:buChar char="•"/>
             </a:pPr>
             <a:r>
-              <a:rPr b="1" sz="1400"/>
+              <a:rPr b="1" sz="1200"/>
               <a:t>Vibration monitoring: </a:t>
             </a:r>
             <a:r>
-              <a:rPr sz="1400"/>
+              <a:rPr sz="1200"/>
               <a:t>akselerometer 10 kHz; RMS/Peak/CF per detik; tren RMS 7 hari naik → inspeksi.</a:t>
             </a:r>
             <a:endParaRPr/>
@@ -17281,60 +17457,60 @@
           <a:p>
             <a:pPr>
               <a:spcAft>
-                <a:spcPts val="600"/>
+                <a:spcPts val="500"/>
               </a:spcAft>
             </a:pPr>
             <a:r>
-              <a:rPr b="1" sz="1400"/>
+              <a:rPr b="1" sz="1200"/>
               <a:t>Kontrol suhu proses: </a:t>
             </a:r>
             <a:r>
-              <a:rPr sz="1400"/>
+              <a:rPr sz="1200"/>
               <a:t>termokopel 1 Hz; rolling mean &amp; std 1 menit sebagai baseline alarm.</a:t>
             </a:r>
           </a:p>
           <a:p>
             <a:pPr>
               <a:spcAft>
-                <a:spcPts val="600"/>
+                <a:spcPts val="500"/>
               </a:spcAft>
             </a:pPr>
             <a:r>
-              <a:rPr b="1" sz="1400"/>
+              <a:rPr b="1" sz="1200"/>
               <a:t>Power quality: </a:t>
             </a:r>
             <a:r>
-              <a:rPr sz="1400"/>
+              <a:rPr sz="1200"/>
               <a:t>arus/tegangan 25,6 kHz; THD &gt; 5% = motor cepat panas, efisiensi turun.</a:t>
             </a:r>
           </a:p>
           <a:p>
             <a:pPr>
               <a:spcAft>
-                <a:spcPts val="600"/>
+                <a:spcPts val="500"/>
               </a:spcAft>
             </a:pPr>
             <a:r>
-              <a:rPr b="1" sz="1400"/>
+              <a:rPr b="1" sz="1200"/>
               <a:t>SCADA &amp; IoT: </a:t>
             </a:r>
             <a:r>
-              <a:rPr sz="1400"/>
+              <a:rPr sz="1200"/>
               <a:t>edge → feature → cloud; sampling tinggi di edge, hanya statistik dikirim.</a:t>
             </a:r>
           </a:p>
           <a:p>
             <a:pPr>
               <a:spcAft>
-                <a:spcPts val="600"/>
+                <a:spcPts val="500"/>
               </a:spcAft>
             </a:pPr>
             <a:r>
-              <a:rPr b="1" sz="1400"/>
+              <a:rPr b="1" sz="1200"/>
               <a:t>Kesalahan umum: </a:t>
             </a:r>
             <a:r>
-              <a:rPr sz="1400"/>
+              <a:rPr sz="1200"/>
               <a:t>fs terlalu rendah (aliasing), tanpa anti-aliasing filter, time stamp tidak akurat, musiman diabaikan.</a:t>
             </a:r>
           </a:p>
@@ -17362,9 +17538,7 @@
           </a:ln>
         </p:spPr>
         <p:txBody>
-          <a:bodyPr anchorCtr="0" anchor="ctr" bIns="45700" lIns="91425" spcFirstLastPara="1" rIns="91425" wrap="square" tIns="45700">
-            <a:normAutofit/>
-          </a:bodyPr>
+          <a:bodyPr anchorCtr="0" anchor="ctr" bIns="45700" lIns="91425" spcFirstLastPara="1" rIns="91425" wrap="square" tIns="45700"/>
           <a:lstStyle/>
           <a:p>
             <a:pPr indent="0" lvl="0" marL="0" rtl="0" algn="l">
@@ -17385,7 +17559,7 @@
               <a:buNone/>
             </a:pPr>
             <a:r>
-              <a:rPr b="1" lang="en-US">
+              <a:rPr b="1" lang="en-US" sz="2800">
                 <a:solidFill>
                   <a:srgbClr val="0070C0"/>
                 </a:solidFill>
@@ -17612,6 +17786,30 @@
           </a:ln>
         </p:spPr>
       </p:cxnSp>
+      <p:pic>
+        <p:nvPicPr>
+          <p:cNvPr id="179" name="Picture 178" descr="g7_samplingbar.png"/>
+          <p:cNvPicPr>
+            <a:picLocks noChangeAspect="1"/>
+          </p:cNvPicPr>
+          <p:nvPr/>
+        </p:nvPicPr>
+        <p:blipFill>
+          <a:blip r:embed="rId5"/>
+          <a:stretch>
+            <a:fillRect/>
+          </a:stretch>
+        </p:blipFill>
+        <p:spPr>
+          <a:xfrm>
+            <a:off x="7911854" y="2151770"/>
+            <a:ext cx="3441945" cy="3222085"/>
+          </a:xfrm>
+          <a:prstGeom prst="rect">
+            <a:avLst/>
+          </a:prstGeom>
+        </p:spPr>
+      </p:pic>
     </p:spTree>
   </p:cSld>
   <p:clrMapOvr>

--- a/Optimalisasi-dan-Automasi/Modul-Word/Modul-1-Pengantar-Time-Series-Data.pptx
+++ b/Optimalisasi-dan-Automasi/Modul-Word/Modul-1-Pengantar-Time-Series-Data.pptx
@@ -12199,7 +12199,7 @@
             </a:r>
             <a:r>
               <a:rPr sz="1200"/>
-              <a:t>conda activate optoauto — numpy, pandas, matplotlib, scipy, statsmodels.</a:t>
+              <a:t>conda activate optoauto; paket numpy, pandas, matplotlib, scipy, statsmodels.</a:t>
             </a:r>
             <a:endParaRPr/>
           </a:p>
@@ -12230,7 +12230,7 @@
             </a:r>
             <a:r>
               <a:rPr sz="1200"/>
-              <a:t>demonstrasi aliasing — sampling 60/100/500 Hz atas sinyal 50 Hz.</a:t>
+              <a:t>demonstrasi aliasing, yaitu sampling 60/100/500 Hz atas sinyal 50 Hz.</a:t>
             </a:r>
           </a:p>
           <a:p>
@@ -12275,7 +12275,7 @@
             </a:r>
             <a:r>
               <a:rPr sz="1200"/>
-              <a:t>p1_pengantar_time_series.ipynb — kode lengkap di halaman modul LMS.</a:t>
+              <a:t>p1_pengantar_time_series.ipynb, kode lengkap di halaman modul LMS.</a:t>
             </a:r>
           </a:p>
         </p:txBody>
@@ -12648,7 +12648,7 @@
             </a:r>
             <a:r>
               <a:rPr sz="1200"/>
-              <a:t>10 PG @1 + 10 komputasi easy @2 + 5 komputasi hard @4 — validasi otomatis server.</a:t>
+              <a:t>10 PG @1 + 10 komputasi easy @2 + 5 komputasi hard @4, validasi otomatis server.</a:t>
             </a:r>
             <a:endParaRPr/>
           </a:p>
@@ -12690,7 +12690,7 @@
             </a:pPr>
             <a:r>
               <a:rPr b="1" sz="1200"/>
-              <a:t>Forum — kasus Rendi: </a:t>
+              <a:t>Forum Kasus Rendi: </a:t>
             </a:r>
             <a:r>
               <a:rPr sz="1200"/>
@@ -13760,7 +13760,7 @@
         </p:nvSpPr>
         <p:spPr>
           <a:xfrm>
-            <a:off x="3692406" y="3422644"/>
+            <a:off x="3692406" y="3572644"/>
             <a:ext cx="3318096" cy="369332"/>
           </a:xfrm>
           <a:prstGeom prst="rect">
@@ -13802,7 +13802,7 @@
                 <a:cs typeface="Arial"/>
                 <a:sym typeface="Arial"/>
               </a:rPr>
-              <a:t>Kode Mata Kuliah P132520004</a:t>
+              <a:t>P132520004</a:t>
             </a:r>
             <a:endParaRPr/>
           </a:p>
@@ -14380,7 +14380,7 @@
                 <a:cs typeface="Open Sans"/>
                 <a:sym typeface="Open Sans"/>
               </a:rPr>
-              <a:t>—</a:t>
+              <a:t>-</a:t>
             </a:r>
             <a:endParaRPr/>
           </a:p>
@@ -14867,7 +14867,7 @@
             </a:r>
             <a:r>
               <a:rPr sz="1200"/>
-              <a:t>akuisisi &amp; pemahaman data time series sensor industri — fondasi seluruh mata kuliah.</a:t>
+              <a:t>akuisisi &amp; pemahaman data time series sensor industri, fondasi seluruh mata kuliah.</a:t>
             </a:r>
             <a:endParaRPr/>
           </a:p>
@@ -14898,7 +14898,7 @@
             </a:r>
             <a:r>
               <a:rPr sz="1200"/>
-              <a:t>prediksi kerusakan, optimasi jadwal, atau otomasi keputusan — data harus diakuisisi dengan benar.</a:t>
+              <a:t>prediksi kerusakan, optimasi jadwal, atau otomasi keputusan, data harus diakuisisi dengan benar.</a:t>
             </a:r>
           </a:p>
           <a:p>
@@ -15235,7 +15235,7 @@
             </a:r>
             <a:r>
               <a:rPr sz="1200"/>
-              <a:t>urutan observasi terhadap indeks waktu, {xt} untuk t = 1..N — urutan adalah informasi.</a:t>
+              <a:t>urutan observasi terhadap indeks waktu, {xt} untuk t = 1..N; urutan adalah informasi.</a:t>
             </a:r>
             <a:endParaRPr/>
           </a:p>
@@ -15251,7 +15251,7 @@
             </a:r>
             <a:r>
               <a:rPr sz="1200"/>
-              <a:t>xt ≈ f(xt−1, xt−2, ...) — mengacak urutan menghancurkan makna.</a:t>
+              <a:t>xt ≈ f(xt−1, xt−2, ...); mengacak urutan menghancurkan makna.</a:t>
             </a:r>
           </a:p>
           <a:p>
@@ -15266,7 +15266,7 @@
             </a:r>
             <a:r>
               <a:rPr sz="1200"/>
-              <a:t>akselerometer, termokopel, strain gauge, arus motor, tekanan — semua menghasilkan time series.</a:t>
+              <a:t>akselerometer, termokopel, strain gauge, arus motor, tekanan; semuanya menghasilkan time series.</a:t>
             </a:r>
           </a:p>
           <a:p>
@@ -15281,7 +15281,7 @@
             </a:r>
             <a:r>
               <a:rPr sz="1200"/>
-              <a:t>x(t) = A·sin(2πft + φ) — dasar FFT, deteksi anomali, dan prediksi.</a:t>
+              <a:t>x(t) = A·sin(2πft + φ), dasar FFT, deteksi anomali, dan prediksi.</a:t>
             </a:r>
           </a:p>
           <a:p>
@@ -15685,7 +15685,7 @@
             </a:r>
             <a:r>
               <a:rPr sz="1200"/>
-              <a:t>pergerakan jangka panjang — aus bearing progresif; linear/eksponensial/logaritmik.</a:t>
+              <a:t>pergerakan jangka panjang, seperti aus bearing progresif; linear/eksponensial/logaritmik.</a:t>
             </a:r>
           </a:p>
           <a:p>
@@ -15715,7 +15715,7 @@
             </a:r>
             <a:r>
               <a:rPr sz="1200"/>
-              <a:t>berulang tanpa periode tetap (ekonomi, permintaan pasar) — tidak terikat kalender.</a:t>
+              <a:t>berulang tanpa periode tetap (ekonomi, permintaan pasar), tidak terikat kalender.</a:t>
             </a:r>
           </a:p>
           <a:p>
@@ -16118,7 +16118,7 @@
             </a:r>
             <a:r>
               <a:rPr sz="1200"/>
-              <a:t>sinyal AC ≈ 0 — pergeserannya menandakan DC offset / drift sensor.</a:t>
+              <a:t>sinyal AC ≈ 0; pergeserannya menandakan DC offset / drift sensor.</a:t>
             </a:r>
             <a:endParaRPr/>
           </a:p>
@@ -16134,7 +16134,7 @@
             </a:r>
             <a:r>
               <a:rPr sz="1200"/>
-              <a:t>√((1/N)Σx²) — energi efektif; basis klasifikasi severity ISO 10816.</a:t>
+              <a:t>√((1/N)Σx²), energi efektif; basis klasifikasi severity ISO 10816.</a:t>
             </a:r>
           </a:p>
           <a:p>
@@ -16164,7 +16164,7 @@
             </a:r>
             <a:r>
               <a:rPr sz="1200"/>
-              <a:t>lonjakan absolut tertinggi — stres mekanik maksimum.</a:t>
+              <a:t>lonjakan absolut tertinggi, yaitu stres mekanik maksimum.</a:t>
             </a:r>
           </a:p>
           <a:p>
@@ -16583,7 +16583,7 @@
             </a:r>
             <a:r>
               <a:rPr sz="1200"/>
-              <a:t>fN = fs/2 — batas frekuensi tertinggi yang dapat direpresentasikan.</a:t>
+              <a:t>fN = fs/2, yaitu batas frekuensi tertinggi yang dapat direpresentasikan.</a:t>
             </a:r>
           </a:p>
           <a:p>
@@ -16598,7 +16598,7 @@
             </a:r>
             <a:r>
               <a:rPr sz="1200"/>
-              <a:t>sinyal di atas fN tampil palsu di bawah fN (falias = |f − k·fs|) — cegah dengan filter analog low-pass.</a:t>
+              <a:t>sinyal di atas fN tampil palsu di bawah fN (falias = |f − k·fs|); cegah dengan filter analog low-pass.</a:t>
             </a:r>
           </a:p>
           <a:p>
@@ -17017,7 +17017,7 @@
             </a:r>
             <a:r>
               <a:rPr sz="1200"/>
-              <a:t>pola harian/mingguan/tahunan + tren — semua komponen dalam satu deret.</a:t>
+              <a:t>pola harian/mingguan/tahunan + tren, yaitu semua komponen dalam satu deret.</a:t>
             </a:r>
           </a:p>
           <a:p>
@@ -17032,7 +17032,7 @@
             </a:r>
             <a:r>
               <a:rPr sz="1200"/>
-              <a:t>normalisasi volume memakai RMS (target −14 LUFS) — energi efektif, bukan puncak.</a:t>
+              <a:t>normalisasi volume memakai RMS (target −14 LUFS), energi efektif, bukan puncak.</a:t>
             </a:r>
           </a:p>
           <a:p>
@@ -17062,7 +17062,7 @@
             </a:r>
             <a:r>
               <a:rPr sz="1200"/>
-              <a:t>peak P-QRS-T tegas = crest factor tinggi; aritmia mengubah CF — mirip bearing spalling.</a:t>
+              <a:t>peak P-QRS-T tegas = crest factor tinggi; aritmia mengubah CF, mirip bearing spalling.</a:t>
             </a:r>
           </a:p>
           <a:p>

--- a/Optimalisasi-dan-Automasi/Modul-Word/Modul-1-Pengantar-Time-Series-Data.pptx
+++ b/Optimalisasi-dan-Automasi/Modul-Word/Modul-1-Pengantar-Time-Series-Data.pptx
@@ -12566,8 +12566,8 @@
         </p:blipFill>
         <p:spPr>
           <a:xfrm>
-            <a:off x="7911854" y="1931991"/>
-            <a:ext cx="3441945" cy="3661643"/>
+            <a:off x="7911854" y="2405470"/>
+            <a:ext cx="3441945" cy="2714685"/>
           </a:xfrm>
           <a:prstGeom prst="rect">
             <a:avLst/>
@@ -13015,8 +13015,8 @@
         </p:blipFill>
         <p:spPr>
           <a:xfrm>
-            <a:off x="7911854" y="2344672"/>
-            <a:ext cx="3441945" cy="2836280"/>
+            <a:off x="7911854" y="2675630"/>
+            <a:ext cx="3441945" cy="2174364"/>
           </a:xfrm>
           <a:prstGeom prst="rect">
             <a:avLst/>
@@ -13161,7 +13161,7 @@
             </a:pPr>
             <a:r>
               <a:rPr sz="1200"/>
-              <a:t>Box, G. E. P., &amp; Cox, D. R. (1964). An analysis of transformations. Journal of the Royal Statistical Society: Series B, 26(2), 211–252.</a:t>
+              <a:t>Altaf, M., Akram, T., Khan, M. A., Iqbal, M., Ch, M. M. I., &amp; Hsu, C.-H. (2022). A new statistical features based approach for bearing fault diagnosis using vibration signals. Sensors, 22(5), 2012. https://doi.org/10.3390/s22052012</a:t>
             </a:r>
             <a:endParaRPr/>
           </a:p>
@@ -13173,7 +13173,7 @@
             </a:pPr>
             <a:r>
               <a:rPr sz="1200"/>
-              <a:t>Cleveland, R. B., Cleveland, W. S., McRae, J. E., &amp; Terpenning, I. (1990). STL: A seasonal-trend decomposition procedure based on loess. Journal of Official Statistics, 6(1), 3–73.</a:t>
+              <a:t>Dudek, G. (2023). STD: A seasonal-trend-dispersion decomposition of time series. IEEE Transactions on Knowledge and Data Engineering, 35(10), 10339–10350. https://doi.org/10.1109/TKDE.2023.3268125</a:t>
             </a:r>
           </a:p>
           <a:p>
@@ -13195,7 +13195,7 @@
             </a:pPr>
             <a:r>
               <a:rPr sz="1200"/>
-              <a:t>Mohanty, A. R. (2015). Machinery Condition Monitoring: Principles and Practices. CRC Press.</a:t>
+              <a:t>Romanssini, M., de Aguirre, P. C. C., Compassi-Severo, L., &amp; Girardi, A. G. (2023). A review on vibration monitoring techniques for predictive maintenance of rotating machinery. Eng, 4(3), 1797–1817. https://doi.org/10.3390/eng4030102</a:t>
             </a:r>
           </a:p>
           <a:p>
@@ -13206,7 +13206,7 @@
             </a:pPr>
             <a:r>
               <a:rPr sz="1200"/>
-              <a:t>Seabold, S., &amp; Perktold, J. (2010). Statsmodels: Econometric and statistical modeling with Python. Proc. 9th Python in Science Conf. https://www.statsmodels.org/stable/tsa.html</a:t>
+              <a:t>Tiboni, M., Remino, C., Bussola, R., &amp; Amici, C. (2022). A review on vibration-based condition monitoring of rotating machinery. Applied Sciences, 12(3), 972. https://doi.org/10.3390/app12030972</a:t>
             </a:r>
           </a:p>
           <a:p>
@@ -13217,7 +13217,18 @@
             </a:pPr>
             <a:r>
               <a:rPr sz="1200"/>
-              <a:t>Pedregosa, F., et al. (2011). Scikit-learn: Machine learning in Python. JMLR, 12, 2825–2830. https://scikit-learn.org/stable/modules/preprocessing.html</a:t>
+              <a:t>Ul Hassan, I., Panduru, K., &amp; Walsh, J. (2024). An in-depth study of vibration sensors for condition monitoring. Sensors, 24(3), 740. https://doi.org/10.3390/s24030740</a:t>
+            </a:r>
+          </a:p>
+          <a:p>
+            <a:pPr>
+              <a:spcAft>
+                <a:spcPts val="600"/>
+              </a:spcAft>
+            </a:pPr>
+            <a:r>
+              <a:rPr sz="1200"/>
+              <a:t>Zeng, A., Chen, M., Zhang, L., &amp; Xu, Q. (2023). Are transformers effective for time series forecasting? Proceedings of the AAAI Conference on Artificial Intelligence, 37(9), 11121–11128. https://doi.org/10.1609/aaai.v37i9.26317</a:t>
             </a:r>
           </a:p>
         </p:txBody>
@@ -15153,8 +15164,8 @@
         </p:blipFill>
         <p:spPr>
           <a:xfrm>
-            <a:off x="8164020" y="1825625"/>
-            <a:ext cx="2937612" cy="3874375"/>
+            <a:off x="8174535" y="1825625"/>
+            <a:ext cx="2916583" cy="3874375"/>
           </a:xfrm>
           <a:prstGeom prst="rect">
             <a:avLst/>
@@ -15587,8 +15598,8 @@
         </p:blipFill>
         <p:spPr>
           <a:xfrm>
-            <a:off x="7911854" y="2368583"/>
-            <a:ext cx="3441945" cy="2788458"/>
+            <a:off x="7911854" y="2544325"/>
+            <a:ext cx="3441945" cy="2436974"/>
           </a:xfrm>
           <a:prstGeom prst="rect">
             <a:avLst/>
@@ -16036,8 +16047,8 @@
         </p:blipFill>
         <p:spPr>
           <a:xfrm>
-            <a:off x="8047358" y="1825625"/>
-            <a:ext cx="3170937" cy="3874375"/>
+            <a:off x="7994093" y="1825625"/>
+            <a:ext cx="3277467" cy="3874375"/>
           </a:xfrm>
           <a:prstGeom prst="rect">
             <a:avLst/>
@@ -16485,8 +16496,8 @@
         </p:blipFill>
         <p:spPr>
           <a:xfrm>
-            <a:off x="7911854" y="2501307"/>
-            <a:ext cx="3441945" cy="2523010"/>
+            <a:off x="7911854" y="2489690"/>
+            <a:ext cx="3441945" cy="2546244"/>
           </a:xfrm>
           <a:prstGeom prst="rect">
             <a:avLst/>
@@ -16919,8 +16930,8 @@
         </p:blipFill>
         <p:spPr>
           <a:xfrm>
-            <a:off x="7911854" y="2496945"/>
-            <a:ext cx="3441945" cy="2531734"/>
+            <a:off x="7911854" y="2320427"/>
+            <a:ext cx="3441945" cy="2884771"/>
           </a:xfrm>
           <a:prstGeom prst="rect">
             <a:avLst/>
@@ -17368,8 +17379,8 @@
         </p:blipFill>
         <p:spPr>
           <a:xfrm>
-            <a:off x="8311215" y="1825625"/>
-            <a:ext cx="2643223" cy="3874375"/>
+            <a:off x="8325661" y="1825625"/>
+            <a:ext cx="2614330" cy="3874375"/>
           </a:xfrm>
           <a:prstGeom prst="rect">
             <a:avLst/>
@@ -17802,8 +17813,8 @@
         </p:blipFill>
         <p:spPr>
           <a:xfrm>
-            <a:off x="7911854" y="2151770"/>
-            <a:ext cx="3441945" cy="3222085"/>
+            <a:off x="7911854" y="2491991"/>
+            <a:ext cx="3441945" cy="2541643"/>
           </a:xfrm>
           <a:prstGeom prst="rect">
             <a:avLst/>
